--- a/test.pptx
+++ b/test.pptx
@@ -3085,7 +3085,7 @@
               <a:rPr lang="en-US"/>
               <a:t>Bienvenue dans votre présentation PowerPoint !</a:t>
             </a:r>
-            <a:endParaRPr lang="fr-FR"/>
+            <a:endParaRPr lang="en-MG"/>
           </a:p>
         </p:txBody>
       </p:sp>
